--- a/tests/Lokad.OoxPdf.Tests/Cases/pptx-text.pptx
+++ b/tests/Lokad.OoxPdf.Tests/Cases/pptx-text.pptx
@@ -129,7 +129,7 @@
           <p:cNvPr id="2" name="Title 1">
             <a:extLst>
               <a:ext uri="{FF2B5EF4-FFF2-40B4-BE49-F238E27FC236}">
-                <a16:creationId xmlns:a16="http://schemas.microsoft.com/office/drawing/2014/main" id="{35C3DBBA-8039-1106-3641-956C97F8AA48}"/>
+                <a16:creationId xmlns:a16="http://schemas.microsoft.com/office/drawing/2014/main" id="{5A4FD72E-9574-F8BE-AE00-B2CF56BDBCCD}"/>
               </a:ext>
             </a:extLst>
           </p:cNvPr>
@@ -166,7 +166,7 @@
           <p:cNvPr id="3" name="Subtitle 2">
             <a:extLst>
               <a:ext uri="{FF2B5EF4-FFF2-40B4-BE49-F238E27FC236}">
-                <a16:creationId xmlns:a16="http://schemas.microsoft.com/office/drawing/2014/main" id="{1D13F24E-57D6-CD3E-3A9E-40A1DD79855C}"/>
+                <a16:creationId xmlns:a16="http://schemas.microsoft.com/office/drawing/2014/main" id="{420FAF84-0090-EDDE-E928-359FA16F02A2}"/>
               </a:ext>
             </a:extLst>
           </p:cNvPr>
@@ -236,7 +236,7 @@
           <p:cNvPr id="4" name="Date Placeholder 3">
             <a:extLst>
               <a:ext uri="{FF2B5EF4-FFF2-40B4-BE49-F238E27FC236}">
-                <a16:creationId xmlns:a16="http://schemas.microsoft.com/office/drawing/2014/main" id="{EF19DB83-3126-21D3-3298-03D716BB42AB}"/>
+                <a16:creationId xmlns:a16="http://schemas.microsoft.com/office/drawing/2014/main" id="{D58062E2-7282-52B8-FF7B-C711E9F1E688}"/>
               </a:ext>
             </a:extLst>
           </p:cNvPr>
@@ -252,7 +252,7 @@
           <a:bodyPr/>
           <a:lstStyle/>
           <a:p>
-            <a:fld id="{718A8C40-7B18-4B18-9FE9-8F83E74096FD}" type="datetimeFigureOut">
+            <a:fld id="{92BF5A9A-39A2-4C78-B6F3-E9CC27A76FE6}" type="datetimeFigureOut">
               <a:rPr lang="en-US" smtClean="0"/>
               <a:t>5/14/2026</a:t>
             </a:fld>
@@ -265,7 +265,7 @@
           <p:cNvPr id="5" name="Footer Placeholder 4">
             <a:extLst>
               <a:ext uri="{FF2B5EF4-FFF2-40B4-BE49-F238E27FC236}">
-                <a16:creationId xmlns:a16="http://schemas.microsoft.com/office/drawing/2014/main" id="{9E4E9C22-4A85-FCCC-9A62-79A6D28AED27}"/>
+                <a16:creationId xmlns:a16="http://schemas.microsoft.com/office/drawing/2014/main" id="{B23A2CE7-20F3-A5BA-B218-28FBC200B790}"/>
               </a:ext>
             </a:extLst>
           </p:cNvPr>
@@ -290,7 +290,7 @@
           <p:cNvPr id="6" name="Slide Number Placeholder 5">
             <a:extLst>
               <a:ext uri="{FF2B5EF4-FFF2-40B4-BE49-F238E27FC236}">
-                <a16:creationId xmlns:a16="http://schemas.microsoft.com/office/drawing/2014/main" id="{59DC5CD3-F470-6D6B-4AF7-50D076A11653}"/>
+                <a16:creationId xmlns:a16="http://schemas.microsoft.com/office/drawing/2014/main" id="{8D7BE658-FA01-AF43-5D91-67B30CD9B286}"/>
               </a:ext>
             </a:extLst>
           </p:cNvPr>
@@ -306,7 +306,7 @@
           <a:bodyPr/>
           <a:lstStyle/>
           <a:p>
-            <a:fld id="{078FF109-60B4-48D6-A3F6-1EE3B900B48E}" type="slidenum">
+            <a:fld id="{ED6A4E44-A60B-4220-8843-7401E652565E}" type="slidenum">
               <a:rPr lang="en-US" smtClean="0"/>
               <a:t>‹#›</a:t>
             </a:fld>
@@ -317,7 +317,7 @@
     </p:spTree>
     <p:extLst>
       <p:ext uri="{BB962C8B-B14F-4D97-AF65-F5344CB8AC3E}">
-        <p14:creationId xmlns:p14="http://schemas.microsoft.com/office/powerpoint/2010/main" val="3616993088"/>
+        <p14:creationId xmlns:p14="http://schemas.microsoft.com/office/powerpoint/2010/main" val="1731877025"/>
       </p:ext>
     </p:extLst>
   </p:cSld>
@@ -349,7 +349,7 @@
           <p:cNvPr id="2" name="Title 1">
             <a:extLst>
               <a:ext uri="{FF2B5EF4-FFF2-40B4-BE49-F238E27FC236}">
-                <a16:creationId xmlns:a16="http://schemas.microsoft.com/office/drawing/2014/main" id="{FAAE95C0-E278-D011-E7F5-C1386DFC1E0B}"/>
+                <a16:creationId xmlns:a16="http://schemas.microsoft.com/office/drawing/2014/main" id="{A9D08C04-B5BA-F78D-BD17-FE25ACBD9759}"/>
               </a:ext>
             </a:extLst>
           </p:cNvPr>
@@ -377,7 +377,7 @@
           <p:cNvPr id="3" name="Vertical Text Placeholder 2">
             <a:extLst>
               <a:ext uri="{FF2B5EF4-FFF2-40B4-BE49-F238E27FC236}">
-                <a16:creationId xmlns:a16="http://schemas.microsoft.com/office/drawing/2014/main" id="{3C1B2357-4FEA-22A1-2FE2-4C72C4F0ABFF}"/>
+                <a16:creationId xmlns:a16="http://schemas.microsoft.com/office/drawing/2014/main" id="{40F5B68B-27E7-8A3A-280B-43D1E9A42ED9}"/>
               </a:ext>
             </a:extLst>
           </p:cNvPr>
@@ -434,7 +434,7 @@
           <p:cNvPr id="4" name="Date Placeholder 3">
             <a:extLst>
               <a:ext uri="{FF2B5EF4-FFF2-40B4-BE49-F238E27FC236}">
-                <a16:creationId xmlns:a16="http://schemas.microsoft.com/office/drawing/2014/main" id="{725BA810-76E1-B15D-A42B-A30D197DAA9E}"/>
+                <a16:creationId xmlns:a16="http://schemas.microsoft.com/office/drawing/2014/main" id="{C6870AB4-373E-0F46-7E6D-DDA7E3D5DE12}"/>
               </a:ext>
             </a:extLst>
           </p:cNvPr>
@@ -450,7 +450,7 @@
           <a:bodyPr/>
           <a:lstStyle/>
           <a:p>
-            <a:fld id="{718A8C40-7B18-4B18-9FE9-8F83E74096FD}" type="datetimeFigureOut">
+            <a:fld id="{92BF5A9A-39A2-4C78-B6F3-E9CC27A76FE6}" type="datetimeFigureOut">
               <a:rPr lang="en-US" smtClean="0"/>
               <a:t>5/14/2026</a:t>
             </a:fld>
@@ -463,7 +463,7 @@
           <p:cNvPr id="5" name="Footer Placeholder 4">
             <a:extLst>
               <a:ext uri="{FF2B5EF4-FFF2-40B4-BE49-F238E27FC236}">
-                <a16:creationId xmlns:a16="http://schemas.microsoft.com/office/drawing/2014/main" id="{E797389F-60EB-EB84-81DA-D25BC4E1E84C}"/>
+                <a16:creationId xmlns:a16="http://schemas.microsoft.com/office/drawing/2014/main" id="{257DF192-C80E-FD99-7F19-566FC1E6A1B1}"/>
               </a:ext>
             </a:extLst>
           </p:cNvPr>
@@ -488,7 +488,7 @@
           <p:cNvPr id="6" name="Slide Number Placeholder 5">
             <a:extLst>
               <a:ext uri="{FF2B5EF4-FFF2-40B4-BE49-F238E27FC236}">
-                <a16:creationId xmlns:a16="http://schemas.microsoft.com/office/drawing/2014/main" id="{60B940A9-F756-A10F-D034-4F03891C8DE8}"/>
+                <a16:creationId xmlns:a16="http://schemas.microsoft.com/office/drawing/2014/main" id="{CDA5E2BF-C995-0DB9-331A-A140BE063E14}"/>
               </a:ext>
             </a:extLst>
           </p:cNvPr>
@@ -504,7 +504,7 @@
           <a:bodyPr/>
           <a:lstStyle/>
           <a:p>
-            <a:fld id="{078FF109-60B4-48D6-A3F6-1EE3B900B48E}" type="slidenum">
+            <a:fld id="{ED6A4E44-A60B-4220-8843-7401E652565E}" type="slidenum">
               <a:rPr lang="en-US" smtClean="0"/>
               <a:t>‹#›</a:t>
             </a:fld>
@@ -515,7 +515,7 @@
     </p:spTree>
     <p:extLst>
       <p:ext uri="{BB962C8B-B14F-4D97-AF65-F5344CB8AC3E}">
-        <p14:creationId xmlns:p14="http://schemas.microsoft.com/office/powerpoint/2010/main" val="3790579878"/>
+        <p14:creationId xmlns:p14="http://schemas.microsoft.com/office/powerpoint/2010/main" val="1704932206"/>
       </p:ext>
     </p:extLst>
   </p:cSld>
@@ -547,7 +547,7 @@
           <p:cNvPr id="2" name="Vertical Title 1">
             <a:extLst>
               <a:ext uri="{FF2B5EF4-FFF2-40B4-BE49-F238E27FC236}">
-                <a16:creationId xmlns:a16="http://schemas.microsoft.com/office/drawing/2014/main" id="{388BF844-08A1-743F-7690-48E540F6B279}"/>
+                <a16:creationId xmlns:a16="http://schemas.microsoft.com/office/drawing/2014/main" id="{CE5215D6-5DBF-1CB8-6401-4BD8CE75063B}"/>
               </a:ext>
             </a:extLst>
           </p:cNvPr>
@@ -580,7 +580,7 @@
           <p:cNvPr id="3" name="Vertical Text Placeholder 2">
             <a:extLst>
               <a:ext uri="{FF2B5EF4-FFF2-40B4-BE49-F238E27FC236}">
-                <a16:creationId xmlns:a16="http://schemas.microsoft.com/office/drawing/2014/main" id="{F81B8F52-4782-71C1-885E-8F836934CA06}"/>
+                <a16:creationId xmlns:a16="http://schemas.microsoft.com/office/drawing/2014/main" id="{D38ACA9D-EF81-727E-29C5-03417658F627}"/>
               </a:ext>
             </a:extLst>
           </p:cNvPr>
@@ -642,7 +642,7 @@
           <p:cNvPr id="4" name="Date Placeholder 3">
             <a:extLst>
               <a:ext uri="{FF2B5EF4-FFF2-40B4-BE49-F238E27FC236}">
-                <a16:creationId xmlns:a16="http://schemas.microsoft.com/office/drawing/2014/main" id="{A8382C00-2CBF-DFE5-A589-6069B3483B01}"/>
+                <a16:creationId xmlns:a16="http://schemas.microsoft.com/office/drawing/2014/main" id="{FEAF38FA-9B6D-52BB-8371-9A91E1D822AF}"/>
               </a:ext>
             </a:extLst>
           </p:cNvPr>
@@ -658,7 +658,7 @@
           <a:bodyPr/>
           <a:lstStyle/>
           <a:p>
-            <a:fld id="{718A8C40-7B18-4B18-9FE9-8F83E74096FD}" type="datetimeFigureOut">
+            <a:fld id="{92BF5A9A-39A2-4C78-B6F3-E9CC27A76FE6}" type="datetimeFigureOut">
               <a:rPr lang="en-US" smtClean="0"/>
               <a:t>5/14/2026</a:t>
             </a:fld>
@@ -671,7 +671,7 @@
           <p:cNvPr id="5" name="Footer Placeholder 4">
             <a:extLst>
               <a:ext uri="{FF2B5EF4-FFF2-40B4-BE49-F238E27FC236}">
-                <a16:creationId xmlns:a16="http://schemas.microsoft.com/office/drawing/2014/main" id="{844A8333-C188-64C7-EAFE-7F1E0BDFCD45}"/>
+                <a16:creationId xmlns:a16="http://schemas.microsoft.com/office/drawing/2014/main" id="{50C0912A-319D-DF91-7043-6C4504E3B1D5}"/>
               </a:ext>
             </a:extLst>
           </p:cNvPr>
@@ -696,7 +696,7 @@
           <p:cNvPr id="6" name="Slide Number Placeholder 5">
             <a:extLst>
               <a:ext uri="{FF2B5EF4-FFF2-40B4-BE49-F238E27FC236}">
-                <a16:creationId xmlns:a16="http://schemas.microsoft.com/office/drawing/2014/main" id="{1ADBCBE0-335B-4013-3671-3974F37E2C08}"/>
+                <a16:creationId xmlns:a16="http://schemas.microsoft.com/office/drawing/2014/main" id="{646D52AC-2E86-99FA-7F01-1BA2233641CF}"/>
               </a:ext>
             </a:extLst>
           </p:cNvPr>
@@ -712,7 +712,7 @@
           <a:bodyPr/>
           <a:lstStyle/>
           <a:p>
-            <a:fld id="{078FF109-60B4-48D6-A3F6-1EE3B900B48E}" type="slidenum">
+            <a:fld id="{ED6A4E44-A60B-4220-8843-7401E652565E}" type="slidenum">
               <a:rPr lang="en-US" smtClean="0"/>
               <a:t>‹#›</a:t>
             </a:fld>
@@ -723,7 +723,7 @@
     </p:spTree>
     <p:extLst>
       <p:ext uri="{BB962C8B-B14F-4D97-AF65-F5344CB8AC3E}">
-        <p14:creationId xmlns:p14="http://schemas.microsoft.com/office/powerpoint/2010/main" val="3305394388"/>
+        <p14:creationId xmlns:p14="http://schemas.microsoft.com/office/powerpoint/2010/main" val="1070879126"/>
       </p:ext>
     </p:extLst>
   </p:cSld>
@@ -755,7 +755,7 @@
           <p:cNvPr id="2" name="Title 1">
             <a:extLst>
               <a:ext uri="{FF2B5EF4-FFF2-40B4-BE49-F238E27FC236}">
-                <a16:creationId xmlns:a16="http://schemas.microsoft.com/office/drawing/2014/main" id="{1D1350DD-CA23-9303-DAD6-CC113296F542}"/>
+                <a16:creationId xmlns:a16="http://schemas.microsoft.com/office/drawing/2014/main" id="{4786F851-8036-347E-DB9C-E55FE20EE03A}"/>
               </a:ext>
             </a:extLst>
           </p:cNvPr>
@@ -783,7 +783,7 @@
           <p:cNvPr id="3" name="Content Placeholder 2">
             <a:extLst>
               <a:ext uri="{FF2B5EF4-FFF2-40B4-BE49-F238E27FC236}">
-                <a16:creationId xmlns:a16="http://schemas.microsoft.com/office/drawing/2014/main" id="{827A1ECB-26C3-0F25-7663-207ACD96451B}"/>
+                <a16:creationId xmlns:a16="http://schemas.microsoft.com/office/drawing/2014/main" id="{74AD94C9-1388-DB74-B8EA-A717F2AB2742}"/>
               </a:ext>
             </a:extLst>
           </p:cNvPr>
@@ -840,7 +840,7 @@
           <p:cNvPr id="4" name="Date Placeholder 3">
             <a:extLst>
               <a:ext uri="{FF2B5EF4-FFF2-40B4-BE49-F238E27FC236}">
-                <a16:creationId xmlns:a16="http://schemas.microsoft.com/office/drawing/2014/main" id="{300C4A59-9C4A-F212-1896-119F7E92CF0E}"/>
+                <a16:creationId xmlns:a16="http://schemas.microsoft.com/office/drawing/2014/main" id="{D59AB573-0844-7506-C095-D9A12FD47C9A}"/>
               </a:ext>
             </a:extLst>
           </p:cNvPr>
@@ -856,7 +856,7 @@
           <a:bodyPr/>
           <a:lstStyle/>
           <a:p>
-            <a:fld id="{718A8C40-7B18-4B18-9FE9-8F83E74096FD}" type="datetimeFigureOut">
+            <a:fld id="{92BF5A9A-39A2-4C78-B6F3-E9CC27A76FE6}" type="datetimeFigureOut">
               <a:rPr lang="en-US" smtClean="0"/>
               <a:t>5/14/2026</a:t>
             </a:fld>
@@ -869,7 +869,7 @@
           <p:cNvPr id="5" name="Footer Placeholder 4">
             <a:extLst>
               <a:ext uri="{FF2B5EF4-FFF2-40B4-BE49-F238E27FC236}">
-                <a16:creationId xmlns:a16="http://schemas.microsoft.com/office/drawing/2014/main" id="{2031D663-E563-564D-B354-1F3C17603F46}"/>
+                <a16:creationId xmlns:a16="http://schemas.microsoft.com/office/drawing/2014/main" id="{FD1A37F2-8C58-3D9B-044C-D4CB3E0C27F9}"/>
               </a:ext>
             </a:extLst>
           </p:cNvPr>
@@ -894,7 +894,7 @@
           <p:cNvPr id="6" name="Slide Number Placeholder 5">
             <a:extLst>
               <a:ext uri="{FF2B5EF4-FFF2-40B4-BE49-F238E27FC236}">
-                <a16:creationId xmlns:a16="http://schemas.microsoft.com/office/drawing/2014/main" id="{8BEA4D7C-4975-445B-30B3-F86575360BF3}"/>
+                <a16:creationId xmlns:a16="http://schemas.microsoft.com/office/drawing/2014/main" id="{DA8CC2CB-FC9F-26CB-0EE1-16B381589EC8}"/>
               </a:ext>
             </a:extLst>
           </p:cNvPr>
@@ -910,7 +910,7 @@
           <a:bodyPr/>
           <a:lstStyle/>
           <a:p>
-            <a:fld id="{078FF109-60B4-48D6-A3F6-1EE3B900B48E}" type="slidenum">
+            <a:fld id="{ED6A4E44-A60B-4220-8843-7401E652565E}" type="slidenum">
               <a:rPr lang="en-US" smtClean="0"/>
               <a:t>‹#›</a:t>
             </a:fld>
@@ -921,7 +921,7 @@
     </p:spTree>
     <p:extLst>
       <p:ext uri="{BB962C8B-B14F-4D97-AF65-F5344CB8AC3E}">
-        <p14:creationId xmlns:p14="http://schemas.microsoft.com/office/powerpoint/2010/main" val="3241265150"/>
+        <p14:creationId xmlns:p14="http://schemas.microsoft.com/office/powerpoint/2010/main" val="3841562117"/>
       </p:ext>
     </p:extLst>
   </p:cSld>
@@ -953,7 +953,7 @@
           <p:cNvPr id="2" name="Title 1">
             <a:extLst>
               <a:ext uri="{FF2B5EF4-FFF2-40B4-BE49-F238E27FC236}">
-                <a16:creationId xmlns:a16="http://schemas.microsoft.com/office/drawing/2014/main" id="{84E7091A-560F-DF69-D829-0D2A009D98C1}"/>
+                <a16:creationId xmlns:a16="http://schemas.microsoft.com/office/drawing/2014/main" id="{82444C5C-0581-02F7-081E-B0EA0EE214B8}"/>
               </a:ext>
             </a:extLst>
           </p:cNvPr>
@@ -990,7 +990,7 @@
           <p:cNvPr id="3" name="Text Placeholder 2">
             <a:extLst>
               <a:ext uri="{FF2B5EF4-FFF2-40B4-BE49-F238E27FC236}">
-                <a16:creationId xmlns:a16="http://schemas.microsoft.com/office/drawing/2014/main" id="{25EFF075-3FFC-1B19-2CDB-1DB83E157DC6}"/>
+                <a16:creationId xmlns:a16="http://schemas.microsoft.com/office/drawing/2014/main" id="{83430712-A2E9-00AF-7B39-577FA197117D}"/>
               </a:ext>
             </a:extLst>
           </p:cNvPr>
@@ -1115,7 +1115,7 @@
           <p:cNvPr id="4" name="Date Placeholder 3">
             <a:extLst>
               <a:ext uri="{FF2B5EF4-FFF2-40B4-BE49-F238E27FC236}">
-                <a16:creationId xmlns:a16="http://schemas.microsoft.com/office/drawing/2014/main" id="{55A15CBB-CD47-196D-9D1A-0BA6721FB504}"/>
+                <a16:creationId xmlns:a16="http://schemas.microsoft.com/office/drawing/2014/main" id="{15054D2E-A383-2C2F-EDE1-746640D88B35}"/>
               </a:ext>
             </a:extLst>
           </p:cNvPr>
@@ -1131,7 +1131,7 @@
           <a:bodyPr/>
           <a:lstStyle/>
           <a:p>
-            <a:fld id="{718A8C40-7B18-4B18-9FE9-8F83E74096FD}" type="datetimeFigureOut">
+            <a:fld id="{92BF5A9A-39A2-4C78-B6F3-E9CC27A76FE6}" type="datetimeFigureOut">
               <a:rPr lang="en-US" smtClean="0"/>
               <a:t>5/14/2026</a:t>
             </a:fld>
@@ -1144,7 +1144,7 @@
           <p:cNvPr id="5" name="Footer Placeholder 4">
             <a:extLst>
               <a:ext uri="{FF2B5EF4-FFF2-40B4-BE49-F238E27FC236}">
-                <a16:creationId xmlns:a16="http://schemas.microsoft.com/office/drawing/2014/main" id="{1B970690-3E1F-90E5-0439-EED7BA674EAD}"/>
+                <a16:creationId xmlns:a16="http://schemas.microsoft.com/office/drawing/2014/main" id="{B89CF9F5-A9F1-D679-CD6B-7DD64F17BDD4}"/>
               </a:ext>
             </a:extLst>
           </p:cNvPr>
@@ -1169,7 +1169,7 @@
           <p:cNvPr id="6" name="Slide Number Placeholder 5">
             <a:extLst>
               <a:ext uri="{FF2B5EF4-FFF2-40B4-BE49-F238E27FC236}">
-                <a16:creationId xmlns:a16="http://schemas.microsoft.com/office/drawing/2014/main" id="{32C9B8C1-B8DB-39B5-0DCC-7B74EBC5B4F5}"/>
+                <a16:creationId xmlns:a16="http://schemas.microsoft.com/office/drawing/2014/main" id="{C401658A-3400-4E76-6CD7-21FDEBB37B55}"/>
               </a:ext>
             </a:extLst>
           </p:cNvPr>
@@ -1185,7 +1185,7 @@
           <a:bodyPr/>
           <a:lstStyle/>
           <a:p>
-            <a:fld id="{078FF109-60B4-48D6-A3F6-1EE3B900B48E}" type="slidenum">
+            <a:fld id="{ED6A4E44-A60B-4220-8843-7401E652565E}" type="slidenum">
               <a:rPr lang="en-US" smtClean="0"/>
               <a:t>‹#›</a:t>
             </a:fld>
@@ -1196,7 +1196,7 @@
     </p:spTree>
     <p:extLst>
       <p:ext uri="{BB962C8B-B14F-4D97-AF65-F5344CB8AC3E}">
-        <p14:creationId xmlns:p14="http://schemas.microsoft.com/office/powerpoint/2010/main" val="528665922"/>
+        <p14:creationId xmlns:p14="http://schemas.microsoft.com/office/powerpoint/2010/main" val="2068049376"/>
       </p:ext>
     </p:extLst>
   </p:cSld>
@@ -1228,7 +1228,7 @@
           <p:cNvPr id="2" name="Title 1">
             <a:extLst>
               <a:ext uri="{FF2B5EF4-FFF2-40B4-BE49-F238E27FC236}">
-                <a16:creationId xmlns:a16="http://schemas.microsoft.com/office/drawing/2014/main" id="{96027BAE-BBAB-1E2F-AAB6-1D6021B62D63}"/>
+                <a16:creationId xmlns:a16="http://schemas.microsoft.com/office/drawing/2014/main" id="{47BCAC3F-64AC-CDF6-C1CA-02B7B3118D2D}"/>
               </a:ext>
             </a:extLst>
           </p:cNvPr>
@@ -1256,7 +1256,7 @@
           <p:cNvPr id="3" name="Content Placeholder 2">
             <a:extLst>
               <a:ext uri="{FF2B5EF4-FFF2-40B4-BE49-F238E27FC236}">
-                <a16:creationId xmlns:a16="http://schemas.microsoft.com/office/drawing/2014/main" id="{C8EA27C4-49BF-4E45-7AF0-95AAD480D201}"/>
+                <a16:creationId xmlns:a16="http://schemas.microsoft.com/office/drawing/2014/main" id="{B81890CD-8963-4542-E2CB-B330ED41F564}"/>
               </a:ext>
             </a:extLst>
           </p:cNvPr>
@@ -1318,7 +1318,7 @@
           <p:cNvPr id="4" name="Content Placeholder 3">
             <a:extLst>
               <a:ext uri="{FF2B5EF4-FFF2-40B4-BE49-F238E27FC236}">
-                <a16:creationId xmlns:a16="http://schemas.microsoft.com/office/drawing/2014/main" id="{8ED4AB07-10E5-5D17-9015-FDB4BE92DA6D}"/>
+                <a16:creationId xmlns:a16="http://schemas.microsoft.com/office/drawing/2014/main" id="{88BD7128-99E0-2FE4-4A0F-B2BA7B410BEC}"/>
               </a:ext>
             </a:extLst>
           </p:cNvPr>
@@ -1380,7 +1380,7 @@
           <p:cNvPr id="5" name="Date Placeholder 4">
             <a:extLst>
               <a:ext uri="{FF2B5EF4-FFF2-40B4-BE49-F238E27FC236}">
-                <a16:creationId xmlns:a16="http://schemas.microsoft.com/office/drawing/2014/main" id="{33628607-D0DB-A11D-D2E4-96563EAD6BA9}"/>
+                <a16:creationId xmlns:a16="http://schemas.microsoft.com/office/drawing/2014/main" id="{42CB9578-1675-9448-EEE2-C10F904E179B}"/>
               </a:ext>
             </a:extLst>
           </p:cNvPr>
@@ -1396,7 +1396,7 @@
           <a:bodyPr/>
           <a:lstStyle/>
           <a:p>
-            <a:fld id="{718A8C40-7B18-4B18-9FE9-8F83E74096FD}" type="datetimeFigureOut">
+            <a:fld id="{92BF5A9A-39A2-4C78-B6F3-E9CC27A76FE6}" type="datetimeFigureOut">
               <a:rPr lang="en-US" smtClean="0"/>
               <a:t>5/14/2026</a:t>
             </a:fld>
@@ -1409,7 +1409,7 @@
           <p:cNvPr id="6" name="Footer Placeholder 5">
             <a:extLst>
               <a:ext uri="{FF2B5EF4-FFF2-40B4-BE49-F238E27FC236}">
-                <a16:creationId xmlns:a16="http://schemas.microsoft.com/office/drawing/2014/main" id="{B946540B-915C-E761-F0C9-F7DAFFF5151F}"/>
+                <a16:creationId xmlns:a16="http://schemas.microsoft.com/office/drawing/2014/main" id="{3B84CC40-9122-6BB3-3E9A-0D551F24D16C}"/>
               </a:ext>
             </a:extLst>
           </p:cNvPr>
@@ -1434,7 +1434,7 @@
           <p:cNvPr id="7" name="Slide Number Placeholder 6">
             <a:extLst>
               <a:ext uri="{FF2B5EF4-FFF2-40B4-BE49-F238E27FC236}">
-                <a16:creationId xmlns:a16="http://schemas.microsoft.com/office/drawing/2014/main" id="{A1E9E7E2-DD1A-9C52-E030-1347CB1A6081}"/>
+                <a16:creationId xmlns:a16="http://schemas.microsoft.com/office/drawing/2014/main" id="{AC6644B6-B954-D8A4-B418-7D188353EE16}"/>
               </a:ext>
             </a:extLst>
           </p:cNvPr>
@@ -1450,7 +1450,7 @@
           <a:bodyPr/>
           <a:lstStyle/>
           <a:p>
-            <a:fld id="{078FF109-60B4-48D6-A3F6-1EE3B900B48E}" type="slidenum">
+            <a:fld id="{ED6A4E44-A60B-4220-8843-7401E652565E}" type="slidenum">
               <a:rPr lang="en-US" smtClean="0"/>
               <a:t>‹#›</a:t>
             </a:fld>
@@ -1461,7 +1461,7 @@
     </p:spTree>
     <p:extLst>
       <p:ext uri="{BB962C8B-B14F-4D97-AF65-F5344CB8AC3E}">
-        <p14:creationId xmlns:p14="http://schemas.microsoft.com/office/powerpoint/2010/main" val="442925193"/>
+        <p14:creationId xmlns:p14="http://schemas.microsoft.com/office/powerpoint/2010/main" val="3675082998"/>
       </p:ext>
     </p:extLst>
   </p:cSld>
@@ -1493,7 +1493,7 @@
           <p:cNvPr id="2" name="Title 1">
             <a:extLst>
               <a:ext uri="{FF2B5EF4-FFF2-40B4-BE49-F238E27FC236}">
-                <a16:creationId xmlns:a16="http://schemas.microsoft.com/office/drawing/2014/main" id="{054FFC89-F8FB-230D-B1C8-9068196D5B89}"/>
+                <a16:creationId xmlns:a16="http://schemas.microsoft.com/office/drawing/2014/main" id="{763E67D9-CEF6-E605-775E-21C727BC11E0}"/>
               </a:ext>
             </a:extLst>
           </p:cNvPr>
@@ -1526,7 +1526,7 @@
           <p:cNvPr id="3" name="Text Placeholder 2">
             <a:extLst>
               <a:ext uri="{FF2B5EF4-FFF2-40B4-BE49-F238E27FC236}">
-                <a16:creationId xmlns:a16="http://schemas.microsoft.com/office/drawing/2014/main" id="{41A0F0F0-480F-BFE8-666F-501E6956966B}"/>
+                <a16:creationId xmlns:a16="http://schemas.microsoft.com/office/drawing/2014/main" id="{A6C16218-E87B-944B-A470-DFB9A2D53270}"/>
               </a:ext>
             </a:extLst>
           </p:cNvPr>
@@ -1597,7 +1597,7 @@
           <p:cNvPr id="4" name="Content Placeholder 3">
             <a:extLst>
               <a:ext uri="{FF2B5EF4-FFF2-40B4-BE49-F238E27FC236}">
-                <a16:creationId xmlns:a16="http://schemas.microsoft.com/office/drawing/2014/main" id="{397560E3-CE6E-BFDC-CCC2-DFEC0BB0ADB7}"/>
+                <a16:creationId xmlns:a16="http://schemas.microsoft.com/office/drawing/2014/main" id="{8C8C6DA7-A037-4870-10E7-EE92DB901735}"/>
               </a:ext>
             </a:extLst>
           </p:cNvPr>
@@ -1659,7 +1659,7 @@
           <p:cNvPr id="5" name="Text Placeholder 4">
             <a:extLst>
               <a:ext uri="{FF2B5EF4-FFF2-40B4-BE49-F238E27FC236}">
-                <a16:creationId xmlns:a16="http://schemas.microsoft.com/office/drawing/2014/main" id="{BD4643F4-65E5-3E25-D6CF-C6DB00C34ADE}"/>
+                <a16:creationId xmlns:a16="http://schemas.microsoft.com/office/drawing/2014/main" id="{D14CD019-004E-0D34-7185-BB82E535E488}"/>
               </a:ext>
             </a:extLst>
           </p:cNvPr>
@@ -1730,7 +1730,7 @@
           <p:cNvPr id="6" name="Content Placeholder 5">
             <a:extLst>
               <a:ext uri="{FF2B5EF4-FFF2-40B4-BE49-F238E27FC236}">
-                <a16:creationId xmlns:a16="http://schemas.microsoft.com/office/drawing/2014/main" id="{ECB33277-0B57-74D2-2C6F-C7539C917F09}"/>
+                <a16:creationId xmlns:a16="http://schemas.microsoft.com/office/drawing/2014/main" id="{DBCAF07C-032E-E8ED-49C4-4705F5E1C793}"/>
               </a:ext>
             </a:extLst>
           </p:cNvPr>
@@ -1792,7 +1792,7 @@
           <p:cNvPr id="7" name="Date Placeholder 6">
             <a:extLst>
               <a:ext uri="{FF2B5EF4-FFF2-40B4-BE49-F238E27FC236}">
-                <a16:creationId xmlns:a16="http://schemas.microsoft.com/office/drawing/2014/main" id="{EEA984F2-86D1-8040-5855-C8161C412236}"/>
+                <a16:creationId xmlns:a16="http://schemas.microsoft.com/office/drawing/2014/main" id="{F88836C9-FE7A-CE8D-3391-D96DF3ECA4AE}"/>
               </a:ext>
             </a:extLst>
           </p:cNvPr>
@@ -1808,7 +1808,7 @@
           <a:bodyPr/>
           <a:lstStyle/>
           <a:p>
-            <a:fld id="{718A8C40-7B18-4B18-9FE9-8F83E74096FD}" type="datetimeFigureOut">
+            <a:fld id="{92BF5A9A-39A2-4C78-B6F3-E9CC27A76FE6}" type="datetimeFigureOut">
               <a:rPr lang="en-US" smtClean="0"/>
               <a:t>5/14/2026</a:t>
             </a:fld>
@@ -1821,7 +1821,7 @@
           <p:cNvPr id="8" name="Footer Placeholder 7">
             <a:extLst>
               <a:ext uri="{FF2B5EF4-FFF2-40B4-BE49-F238E27FC236}">
-                <a16:creationId xmlns:a16="http://schemas.microsoft.com/office/drawing/2014/main" id="{029E50D6-4817-7EA0-3AF9-2CC2C0359F8D}"/>
+                <a16:creationId xmlns:a16="http://schemas.microsoft.com/office/drawing/2014/main" id="{D8737FA2-D21A-4B02-08BF-95D099A109A0}"/>
               </a:ext>
             </a:extLst>
           </p:cNvPr>
@@ -1846,7 +1846,7 @@
           <p:cNvPr id="9" name="Slide Number Placeholder 8">
             <a:extLst>
               <a:ext uri="{FF2B5EF4-FFF2-40B4-BE49-F238E27FC236}">
-                <a16:creationId xmlns:a16="http://schemas.microsoft.com/office/drawing/2014/main" id="{11231072-6CF4-6EDA-C644-7B6046255F2F}"/>
+                <a16:creationId xmlns:a16="http://schemas.microsoft.com/office/drawing/2014/main" id="{99CAC371-DD87-47A3-5919-1725956597C3}"/>
               </a:ext>
             </a:extLst>
           </p:cNvPr>
@@ -1862,7 +1862,7 @@
           <a:bodyPr/>
           <a:lstStyle/>
           <a:p>
-            <a:fld id="{078FF109-60B4-48D6-A3F6-1EE3B900B48E}" type="slidenum">
+            <a:fld id="{ED6A4E44-A60B-4220-8843-7401E652565E}" type="slidenum">
               <a:rPr lang="en-US" smtClean="0"/>
               <a:t>‹#›</a:t>
             </a:fld>
@@ -1873,7 +1873,7 @@
     </p:spTree>
     <p:extLst>
       <p:ext uri="{BB962C8B-B14F-4D97-AF65-F5344CB8AC3E}">
-        <p14:creationId xmlns:p14="http://schemas.microsoft.com/office/powerpoint/2010/main" val="269839139"/>
+        <p14:creationId xmlns:p14="http://schemas.microsoft.com/office/powerpoint/2010/main" val="1215154819"/>
       </p:ext>
     </p:extLst>
   </p:cSld>
@@ -1905,7 +1905,7 @@
           <p:cNvPr id="2" name="Title 1">
             <a:extLst>
               <a:ext uri="{FF2B5EF4-FFF2-40B4-BE49-F238E27FC236}">
-                <a16:creationId xmlns:a16="http://schemas.microsoft.com/office/drawing/2014/main" id="{0AFB4420-EB53-FB19-70F8-3725B1426163}"/>
+                <a16:creationId xmlns:a16="http://schemas.microsoft.com/office/drawing/2014/main" id="{4FAE6F0D-A3F4-CA40-D5C3-C55B01EDA552}"/>
               </a:ext>
             </a:extLst>
           </p:cNvPr>
@@ -1933,7 +1933,7 @@
           <p:cNvPr id="3" name="Date Placeholder 2">
             <a:extLst>
               <a:ext uri="{FF2B5EF4-FFF2-40B4-BE49-F238E27FC236}">
-                <a16:creationId xmlns:a16="http://schemas.microsoft.com/office/drawing/2014/main" id="{BC3079C7-9F7D-0C98-BA66-AD4637F6C1EA}"/>
+                <a16:creationId xmlns:a16="http://schemas.microsoft.com/office/drawing/2014/main" id="{3103963A-A497-18E2-BA78-526ADB0D03DF}"/>
               </a:ext>
             </a:extLst>
           </p:cNvPr>
@@ -1949,7 +1949,7 @@
           <a:bodyPr/>
           <a:lstStyle/>
           <a:p>
-            <a:fld id="{718A8C40-7B18-4B18-9FE9-8F83E74096FD}" type="datetimeFigureOut">
+            <a:fld id="{92BF5A9A-39A2-4C78-B6F3-E9CC27A76FE6}" type="datetimeFigureOut">
               <a:rPr lang="en-US" smtClean="0"/>
               <a:t>5/14/2026</a:t>
             </a:fld>
@@ -1962,7 +1962,7 @@
           <p:cNvPr id="4" name="Footer Placeholder 3">
             <a:extLst>
               <a:ext uri="{FF2B5EF4-FFF2-40B4-BE49-F238E27FC236}">
-                <a16:creationId xmlns:a16="http://schemas.microsoft.com/office/drawing/2014/main" id="{C534CF3C-7FBE-CFDE-8C38-3240CC6234D4}"/>
+                <a16:creationId xmlns:a16="http://schemas.microsoft.com/office/drawing/2014/main" id="{D2CB0F86-1F34-1CC7-ADB7-8C4D59664631}"/>
               </a:ext>
             </a:extLst>
           </p:cNvPr>
@@ -1987,7 +1987,7 @@
           <p:cNvPr id="5" name="Slide Number Placeholder 4">
             <a:extLst>
               <a:ext uri="{FF2B5EF4-FFF2-40B4-BE49-F238E27FC236}">
-                <a16:creationId xmlns:a16="http://schemas.microsoft.com/office/drawing/2014/main" id="{605714EE-1ECB-36E0-F342-975DACA99316}"/>
+                <a16:creationId xmlns:a16="http://schemas.microsoft.com/office/drawing/2014/main" id="{54E149C3-F73D-4113-2804-AA1FDAF1D0B7}"/>
               </a:ext>
             </a:extLst>
           </p:cNvPr>
@@ -2003,7 +2003,7 @@
           <a:bodyPr/>
           <a:lstStyle/>
           <a:p>
-            <a:fld id="{078FF109-60B4-48D6-A3F6-1EE3B900B48E}" type="slidenum">
+            <a:fld id="{ED6A4E44-A60B-4220-8843-7401E652565E}" type="slidenum">
               <a:rPr lang="en-US" smtClean="0"/>
               <a:t>‹#›</a:t>
             </a:fld>
@@ -2014,7 +2014,7 @@
     </p:spTree>
     <p:extLst>
       <p:ext uri="{BB962C8B-B14F-4D97-AF65-F5344CB8AC3E}">
-        <p14:creationId xmlns:p14="http://schemas.microsoft.com/office/powerpoint/2010/main" val="669589744"/>
+        <p14:creationId xmlns:p14="http://schemas.microsoft.com/office/powerpoint/2010/main" val="3510149802"/>
       </p:ext>
     </p:extLst>
   </p:cSld>
@@ -2046,7 +2046,7 @@
           <p:cNvPr id="2" name="Date Placeholder 1">
             <a:extLst>
               <a:ext uri="{FF2B5EF4-FFF2-40B4-BE49-F238E27FC236}">
-                <a16:creationId xmlns:a16="http://schemas.microsoft.com/office/drawing/2014/main" id="{343B9709-395D-6A18-67BA-654F3E57EC50}"/>
+                <a16:creationId xmlns:a16="http://schemas.microsoft.com/office/drawing/2014/main" id="{964C0AD2-3316-2C79-A420-E0E80B2B0961}"/>
               </a:ext>
             </a:extLst>
           </p:cNvPr>
@@ -2062,7 +2062,7 @@
           <a:bodyPr/>
           <a:lstStyle/>
           <a:p>
-            <a:fld id="{718A8C40-7B18-4B18-9FE9-8F83E74096FD}" type="datetimeFigureOut">
+            <a:fld id="{92BF5A9A-39A2-4C78-B6F3-E9CC27A76FE6}" type="datetimeFigureOut">
               <a:rPr lang="en-US" smtClean="0"/>
               <a:t>5/14/2026</a:t>
             </a:fld>
@@ -2075,7 +2075,7 @@
           <p:cNvPr id="3" name="Footer Placeholder 2">
             <a:extLst>
               <a:ext uri="{FF2B5EF4-FFF2-40B4-BE49-F238E27FC236}">
-                <a16:creationId xmlns:a16="http://schemas.microsoft.com/office/drawing/2014/main" id="{222C031D-56E9-427D-3AC1-166B0A995664}"/>
+                <a16:creationId xmlns:a16="http://schemas.microsoft.com/office/drawing/2014/main" id="{70A78BEC-4B23-75C5-54DD-06D5193075AE}"/>
               </a:ext>
             </a:extLst>
           </p:cNvPr>
@@ -2100,7 +2100,7 @@
           <p:cNvPr id="4" name="Slide Number Placeholder 3">
             <a:extLst>
               <a:ext uri="{FF2B5EF4-FFF2-40B4-BE49-F238E27FC236}">
-                <a16:creationId xmlns:a16="http://schemas.microsoft.com/office/drawing/2014/main" id="{5340EE7D-4364-9F72-A7FA-6802F8FC969E}"/>
+                <a16:creationId xmlns:a16="http://schemas.microsoft.com/office/drawing/2014/main" id="{D53D78AE-F17F-B241-F855-0592AC8E11F2}"/>
               </a:ext>
             </a:extLst>
           </p:cNvPr>
@@ -2116,7 +2116,7 @@
           <a:bodyPr/>
           <a:lstStyle/>
           <a:p>
-            <a:fld id="{078FF109-60B4-48D6-A3F6-1EE3B900B48E}" type="slidenum">
+            <a:fld id="{ED6A4E44-A60B-4220-8843-7401E652565E}" type="slidenum">
               <a:rPr lang="en-US" smtClean="0"/>
               <a:t>‹#›</a:t>
             </a:fld>
@@ -2127,7 +2127,7 @@
     </p:spTree>
     <p:extLst>
       <p:ext uri="{BB962C8B-B14F-4D97-AF65-F5344CB8AC3E}">
-        <p14:creationId xmlns:p14="http://schemas.microsoft.com/office/powerpoint/2010/main" val="3674557930"/>
+        <p14:creationId xmlns:p14="http://schemas.microsoft.com/office/powerpoint/2010/main" val="3979211335"/>
       </p:ext>
     </p:extLst>
   </p:cSld>
@@ -2159,7 +2159,7 @@
           <p:cNvPr id="2" name="Title 1">
             <a:extLst>
               <a:ext uri="{FF2B5EF4-FFF2-40B4-BE49-F238E27FC236}">
-                <a16:creationId xmlns:a16="http://schemas.microsoft.com/office/drawing/2014/main" id="{EB71C3C5-DBBC-FFDE-5C25-FE00ABE90511}"/>
+                <a16:creationId xmlns:a16="http://schemas.microsoft.com/office/drawing/2014/main" id="{3839C7E3-E29C-F647-08FC-C46DB383BB02}"/>
               </a:ext>
             </a:extLst>
           </p:cNvPr>
@@ -2196,7 +2196,7 @@
           <p:cNvPr id="3" name="Content Placeholder 2">
             <a:extLst>
               <a:ext uri="{FF2B5EF4-FFF2-40B4-BE49-F238E27FC236}">
-                <a16:creationId xmlns:a16="http://schemas.microsoft.com/office/drawing/2014/main" id="{91BB1EC8-334F-9461-6CFD-61C3FB329832}"/>
+                <a16:creationId xmlns:a16="http://schemas.microsoft.com/office/drawing/2014/main" id="{C44604B1-A493-09DC-029D-81127EAC093E}"/>
               </a:ext>
             </a:extLst>
           </p:cNvPr>
@@ -2286,7 +2286,7 @@
           <p:cNvPr id="4" name="Text Placeholder 3">
             <a:extLst>
               <a:ext uri="{FF2B5EF4-FFF2-40B4-BE49-F238E27FC236}">
-                <a16:creationId xmlns:a16="http://schemas.microsoft.com/office/drawing/2014/main" id="{8327C40D-574F-864C-F692-7AC0DBC1B485}"/>
+                <a16:creationId xmlns:a16="http://schemas.microsoft.com/office/drawing/2014/main" id="{A20C6DA0-87E0-36A5-B661-005DA7A9B557}"/>
               </a:ext>
             </a:extLst>
           </p:cNvPr>
@@ -2357,7 +2357,7 @@
           <p:cNvPr id="5" name="Date Placeholder 4">
             <a:extLst>
               <a:ext uri="{FF2B5EF4-FFF2-40B4-BE49-F238E27FC236}">
-                <a16:creationId xmlns:a16="http://schemas.microsoft.com/office/drawing/2014/main" id="{8DC89BFB-9A38-2627-436A-8CE6D30C043C}"/>
+                <a16:creationId xmlns:a16="http://schemas.microsoft.com/office/drawing/2014/main" id="{1760EAF9-4CFE-2451-E089-735C25DCECEF}"/>
               </a:ext>
             </a:extLst>
           </p:cNvPr>
@@ -2373,7 +2373,7 @@
           <a:bodyPr/>
           <a:lstStyle/>
           <a:p>
-            <a:fld id="{718A8C40-7B18-4B18-9FE9-8F83E74096FD}" type="datetimeFigureOut">
+            <a:fld id="{92BF5A9A-39A2-4C78-B6F3-E9CC27A76FE6}" type="datetimeFigureOut">
               <a:rPr lang="en-US" smtClean="0"/>
               <a:t>5/14/2026</a:t>
             </a:fld>
@@ -2386,7 +2386,7 @@
           <p:cNvPr id="6" name="Footer Placeholder 5">
             <a:extLst>
               <a:ext uri="{FF2B5EF4-FFF2-40B4-BE49-F238E27FC236}">
-                <a16:creationId xmlns:a16="http://schemas.microsoft.com/office/drawing/2014/main" id="{F7A01671-4FB7-DECE-2255-B26F87A1B507}"/>
+                <a16:creationId xmlns:a16="http://schemas.microsoft.com/office/drawing/2014/main" id="{27E8E0A5-1E8D-0713-59CB-CE3FF60CBB6D}"/>
               </a:ext>
             </a:extLst>
           </p:cNvPr>
@@ -2411,7 +2411,7 @@
           <p:cNvPr id="7" name="Slide Number Placeholder 6">
             <a:extLst>
               <a:ext uri="{FF2B5EF4-FFF2-40B4-BE49-F238E27FC236}">
-                <a16:creationId xmlns:a16="http://schemas.microsoft.com/office/drawing/2014/main" id="{A2A562A1-3717-9D99-8FF7-F30745B3E3C2}"/>
+                <a16:creationId xmlns:a16="http://schemas.microsoft.com/office/drawing/2014/main" id="{52BA3C8A-20C4-22C1-1120-A31CCF5E8464}"/>
               </a:ext>
             </a:extLst>
           </p:cNvPr>
@@ -2427,7 +2427,7 @@
           <a:bodyPr/>
           <a:lstStyle/>
           <a:p>
-            <a:fld id="{078FF109-60B4-48D6-A3F6-1EE3B900B48E}" type="slidenum">
+            <a:fld id="{ED6A4E44-A60B-4220-8843-7401E652565E}" type="slidenum">
               <a:rPr lang="en-US" smtClean="0"/>
               <a:t>‹#›</a:t>
             </a:fld>
@@ -2438,7 +2438,7 @@
     </p:spTree>
     <p:extLst>
       <p:ext uri="{BB962C8B-B14F-4D97-AF65-F5344CB8AC3E}">
-        <p14:creationId xmlns:p14="http://schemas.microsoft.com/office/powerpoint/2010/main" val="4145228465"/>
+        <p14:creationId xmlns:p14="http://schemas.microsoft.com/office/powerpoint/2010/main" val="2654081373"/>
       </p:ext>
     </p:extLst>
   </p:cSld>
@@ -2470,7 +2470,7 @@
           <p:cNvPr id="2" name="Title 1">
             <a:extLst>
               <a:ext uri="{FF2B5EF4-FFF2-40B4-BE49-F238E27FC236}">
-                <a16:creationId xmlns:a16="http://schemas.microsoft.com/office/drawing/2014/main" id="{7901846F-D60F-EF23-2A97-F9521F4D2402}"/>
+                <a16:creationId xmlns:a16="http://schemas.microsoft.com/office/drawing/2014/main" id="{854AD464-46AB-40C9-F866-EA115D83B6D5}"/>
               </a:ext>
             </a:extLst>
           </p:cNvPr>
@@ -2507,7 +2507,7 @@
           <p:cNvPr id="3" name="Picture Placeholder 2">
             <a:extLst>
               <a:ext uri="{FF2B5EF4-FFF2-40B4-BE49-F238E27FC236}">
-                <a16:creationId xmlns:a16="http://schemas.microsoft.com/office/drawing/2014/main" id="{CE4DEED0-1520-E608-6C13-040941AB4FC1}"/>
+                <a16:creationId xmlns:a16="http://schemas.microsoft.com/office/drawing/2014/main" id="{48D44174-0D92-8B53-4DEF-EFFE5F9F8EC4}"/>
               </a:ext>
             </a:extLst>
           </p:cNvPr>
@@ -2574,7 +2574,7 @@
           <p:cNvPr id="4" name="Text Placeholder 3">
             <a:extLst>
               <a:ext uri="{FF2B5EF4-FFF2-40B4-BE49-F238E27FC236}">
-                <a16:creationId xmlns:a16="http://schemas.microsoft.com/office/drawing/2014/main" id="{8370CA38-3BAC-33F9-6CB3-C8F4C8AB06FD}"/>
+                <a16:creationId xmlns:a16="http://schemas.microsoft.com/office/drawing/2014/main" id="{88B56782-DA7F-5AD1-79A9-FCE95459BF7B}"/>
               </a:ext>
             </a:extLst>
           </p:cNvPr>
@@ -2645,7 +2645,7 @@
           <p:cNvPr id="5" name="Date Placeholder 4">
             <a:extLst>
               <a:ext uri="{FF2B5EF4-FFF2-40B4-BE49-F238E27FC236}">
-                <a16:creationId xmlns:a16="http://schemas.microsoft.com/office/drawing/2014/main" id="{5526E29F-71A7-DFB9-C84C-D9AE260C8581}"/>
+                <a16:creationId xmlns:a16="http://schemas.microsoft.com/office/drawing/2014/main" id="{8707C7CE-BDA0-7946-CD0D-197447E883D5}"/>
               </a:ext>
             </a:extLst>
           </p:cNvPr>
@@ -2661,7 +2661,7 @@
           <a:bodyPr/>
           <a:lstStyle/>
           <a:p>
-            <a:fld id="{718A8C40-7B18-4B18-9FE9-8F83E74096FD}" type="datetimeFigureOut">
+            <a:fld id="{92BF5A9A-39A2-4C78-B6F3-E9CC27A76FE6}" type="datetimeFigureOut">
               <a:rPr lang="en-US" smtClean="0"/>
               <a:t>5/14/2026</a:t>
             </a:fld>
@@ -2674,7 +2674,7 @@
           <p:cNvPr id="6" name="Footer Placeholder 5">
             <a:extLst>
               <a:ext uri="{FF2B5EF4-FFF2-40B4-BE49-F238E27FC236}">
-                <a16:creationId xmlns:a16="http://schemas.microsoft.com/office/drawing/2014/main" id="{8584918B-A811-8881-B4D3-4953480E96D7}"/>
+                <a16:creationId xmlns:a16="http://schemas.microsoft.com/office/drawing/2014/main" id="{970D2C74-4A31-AC24-97B0-0192AE391F21}"/>
               </a:ext>
             </a:extLst>
           </p:cNvPr>
@@ -2699,7 +2699,7 @@
           <p:cNvPr id="7" name="Slide Number Placeholder 6">
             <a:extLst>
               <a:ext uri="{FF2B5EF4-FFF2-40B4-BE49-F238E27FC236}">
-                <a16:creationId xmlns:a16="http://schemas.microsoft.com/office/drawing/2014/main" id="{D8D2B849-5DC6-2FA8-765B-C0BEEA86FF6A}"/>
+                <a16:creationId xmlns:a16="http://schemas.microsoft.com/office/drawing/2014/main" id="{730C764A-5C9A-39B4-DB15-30AECFD968CA}"/>
               </a:ext>
             </a:extLst>
           </p:cNvPr>
@@ -2715,7 +2715,7 @@
           <a:bodyPr/>
           <a:lstStyle/>
           <a:p>
-            <a:fld id="{078FF109-60B4-48D6-A3F6-1EE3B900B48E}" type="slidenum">
+            <a:fld id="{ED6A4E44-A60B-4220-8843-7401E652565E}" type="slidenum">
               <a:rPr lang="en-US" smtClean="0"/>
               <a:t>‹#›</a:t>
             </a:fld>
@@ -2726,7 +2726,7 @@
     </p:spTree>
     <p:extLst>
       <p:ext uri="{BB962C8B-B14F-4D97-AF65-F5344CB8AC3E}">
-        <p14:creationId xmlns:p14="http://schemas.microsoft.com/office/powerpoint/2010/main" val="482440891"/>
+        <p14:creationId xmlns:p14="http://schemas.microsoft.com/office/powerpoint/2010/main" val="3224134916"/>
       </p:ext>
     </p:extLst>
   </p:cSld>
@@ -2763,7 +2763,7 @@
           <p:cNvPr id="2" name="Title Placeholder 1">
             <a:extLst>
               <a:ext uri="{FF2B5EF4-FFF2-40B4-BE49-F238E27FC236}">
-                <a16:creationId xmlns:a16="http://schemas.microsoft.com/office/drawing/2014/main" id="{770A54CF-688C-FFB4-4CDF-76608A8E551C}"/>
+                <a16:creationId xmlns:a16="http://schemas.microsoft.com/office/drawing/2014/main" id="{2067E8D2-7BCA-59BF-84B8-86871BBC713D}"/>
               </a:ext>
             </a:extLst>
           </p:cNvPr>
@@ -2801,7 +2801,7 @@
           <p:cNvPr id="3" name="Text Placeholder 2">
             <a:extLst>
               <a:ext uri="{FF2B5EF4-FFF2-40B4-BE49-F238E27FC236}">
-                <a16:creationId xmlns:a16="http://schemas.microsoft.com/office/drawing/2014/main" id="{EB5EDF65-2E35-D204-FFA4-9A7013D91C6D}"/>
+                <a16:creationId xmlns:a16="http://schemas.microsoft.com/office/drawing/2014/main" id="{1E36B222-82F2-5BA1-701B-D1B148D4EEB9}"/>
               </a:ext>
             </a:extLst>
           </p:cNvPr>
@@ -2868,7 +2868,7 @@
           <p:cNvPr id="4" name="Date Placeholder 3">
             <a:extLst>
               <a:ext uri="{FF2B5EF4-FFF2-40B4-BE49-F238E27FC236}">
-                <a16:creationId xmlns:a16="http://schemas.microsoft.com/office/drawing/2014/main" id="{4EAAA995-AE0A-DFDC-B075-D84D7B6F014F}"/>
+                <a16:creationId xmlns:a16="http://schemas.microsoft.com/office/drawing/2014/main" id="{8B6714A6-2706-BB3F-617C-DAF845C219B4}"/>
               </a:ext>
             </a:extLst>
           </p:cNvPr>
@@ -2902,7 +2902,7 @@
             </a:lvl1pPr>
           </a:lstStyle>
           <a:p>
-            <a:fld id="{718A8C40-7B18-4B18-9FE9-8F83E74096FD}" type="datetimeFigureOut">
+            <a:fld id="{92BF5A9A-39A2-4C78-B6F3-E9CC27A76FE6}" type="datetimeFigureOut">
               <a:rPr lang="en-US" smtClean="0"/>
               <a:t>5/14/2026</a:t>
             </a:fld>
@@ -2915,7 +2915,7 @@
           <p:cNvPr id="5" name="Footer Placeholder 4">
             <a:extLst>
               <a:ext uri="{FF2B5EF4-FFF2-40B4-BE49-F238E27FC236}">
-                <a16:creationId xmlns:a16="http://schemas.microsoft.com/office/drawing/2014/main" id="{B3D1934E-0F6A-AD02-D039-3317372AF07E}"/>
+                <a16:creationId xmlns:a16="http://schemas.microsoft.com/office/drawing/2014/main" id="{4624BA6F-6B4F-0821-630A-EBB123B6CA72}"/>
               </a:ext>
             </a:extLst>
           </p:cNvPr>
@@ -2958,7 +2958,7 @@
           <p:cNvPr id="6" name="Slide Number Placeholder 5">
             <a:extLst>
               <a:ext uri="{FF2B5EF4-FFF2-40B4-BE49-F238E27FC236}">
-                <a16:creationId xmlns:a16="http://schemas.microsoft.com/office/drawing/2014/main" id="{6229D408-AE40-5D8A-7341-47AA674D8DE3}"/>
+                <a16:creationId xmlns:a16="http://schemas.microsoft.com/office/drawing/2014/main" id="{E84498D5-1A39-4FD8-D937-C22FD5955925}"/>
               </a:ext>
             </a:extLst>
           </p:cNvPr>
@@ -2992,7 +2992,7 @@
             </a:lvl1pPr>
           </a:lstStyle>
           <a:p>
-            <a:fld id="{078FF109-60B4-48D6-A3F6-1EE3B900B48E}" type="slidenum">
+            <a:fld id="{ED6A4E44-A60B-4220-8843-7401E652565E}" type="slidenum">
               <a:rPr lang="en-US" smtClean="0"/>
               <a:t>‹#›</a:t>
             </a:fld>
@@ -3003,7 +3003,7 @@
     </p:spTree>
     <p:extLst>
       <p:ext uri="{BB962C8B-B14F-4D97-AF65-F5344CB8AC3E}">
-        <p14:creationId xmlns:p14="http://schemas.microsoft.com/office/powerpoint/2010/main" val="2287483217"/>
+        <p14:creationId xmlns:p14="http://schemas.microsoft.com/office/powerpoint/2010/main" val="1611881974"/>
       </p:ext>
     </p:extLst>
   </p:cSld>
@@ -3326,7 +3326,7 @@
           <p:cNvPr id="2" name="TextBox 1">
             <a:extLst>
               <a:ext uri="{FF2B5EF4-FFF2-40B4-BE49-F238E27FC236}">
-                <a16:creationId xmlns:a16="http://schemas.microsoft.com/office/drawing/2014/main" id="{B9EDBDB3-E482-E7EC-8F5A-D0FB439C6B88}"/>
+                <a16:creationId xmlns:a16="http://schemas.microsoft.com/office/drawing/2014/main" id="{1B2A2897-C5D2-1642-591A-48E6F18353FA}"/>
               </a:ext>
             </a:extLst>
           </p:cNvPr>
@@ -3366,7 +3366,7 @@
           <p:cNvPr id="3" name="TextBox 2">
             <a:extLst>
               <a:ext uri="{FF2B5EF4-FFF2-40B4-BE49-F238E27FC236}">
-                <a16:creationId xmlns:a16="http://schemas.microsoft.com/office/drawing/2014/main" id="{3AE7BB03-CC5D-A45E-293B-074D528DC1F2}"/>
+                <a16:creationId xmlns:a16="http://schemas.microsoft.com/office/drawing/2014/main" id="{1BCE72AC-4ECB-2AD2-ECA2-1E2B98461F83}"/>
               </a:ext>
             </a:extLst>
           </p:cNvPr>
@@ -3404,7 +3404,7 @@
     </p:spTree>
     <p:extLst>
       <p:ext uri="{BB962C8B-B14F-4D97-AF65-F5344CB8AC3E}">
-        <p14:creationId xmlns:p14="http://schemas.microsoft.com/office/powerpoint/2010/main" val="4003674654"/>
+        <p14:creationId xmlns:p14="http://schemas.microsoft.com/office/powerpoint/2010/main" val="265680856"/>
       </p:ext>
     </p:extLst>
   </p:cSld>
